--- a/Presentations/Week_9_Presentation.pptx
+++ b/Presentations/Week_9_Presentation.pptx
@@ -5,28 +5,29 @@
     <p:sldMasterId id="2147483648" r:id="rId4"/>
   </p:sldMasterIdLst>
   <p:notesMasterIdLst>
-    <p:notesMasterId r:id="rId21"/>
+    <p:notesMasterId r:id="rId22"/>
   </p:notesMasterIdLst>
   <p:handoutMasterIdLst>
-    <p:handoutMasterId r:id="rId22"/>
+    <p:handoutMasterId r:id="rId23"/>
   </p:handoutMasterIdLst>
   <p:sldIdLst>
     <p:sldId id="305" r:id="rId5"/>
     <p:sldId id="306" r:id="rId6"/>
     <p:sldId id="319" r:id="rId7"/>
     <p:sldId id="366" r:id="rId8"/>
-    <p:sldId id="355" r:id="rId9"/>
-    <p:sldId id="356" r:id="rId10"/>
-    <p:sldId id="345" r:id="rId11"/>
-    <p:sldId id="361" r:id="rId12"/>
-    <p:sldId id="364" r:id="rId13"/>
-    <p:sldId id="363" r:id="rId14"/>
-    <p:sldId id="358" r:id="rId15"/>
-    <p:sldId id="362" r:id="rId16"/>
-    <p:sldId id="365" r:id="rId17"/>
-    <p:sldId id="331" r:id="rId18"/>
-    <p:sldId id="330" r:id="rId19"/>
-    <p:sldId id="318" r:id="rId20"/>
+    <p:sldId id="367" r:id="rId9"/>
+    <p:sldId id="355" r:id="rId10"/>
+    <p:sldId id="356" r:id="rId11"/>
+    <p:sldId id="345" r:id="rId12"/>
+    <p:sldId id="361" r:id="rId13"/>
+    <p:sldId id="364" r:id="rId14"/>
+    <p:sldId id="363" r:id="rId15"/>
+    <p:sldId id="358" r:id="rId16"/>
+    <p:sldId id="362" r:id="rId17"/>
+    <p:sldId id="365" r:id="rId18"/>
+    <p:sldId id="331" r:id="rId19"/>
+    <p:sldId id="330" r:id="rId20"/>
+    <p:sldId id="318" r:id="rId21"/>
   </p:sldIdLst>
   <p:sldSz cx="12192000" cy="6858000"/>
   <p:notesSz cx="6858000" cy="9144000"/>
@@ -7643,6 +7644,145 @@
   <p:cSld>
     <p:spTree>
       <p:nvGrpSpPr>
+        <p:cNvPr id="1" name=""/>
+        <p:cNvGrpSpPr/>
+        <p:nvPr/>
+      </p:nvGrpSpPr>
+      <p:grpSpPr>
+        <a:xfrm>
+          <a:off x="0" y="0"/>
+          <a:ext cx="0" cy="0"/>
+          <a:chOff x="0" y="0"/>
+          <a:chExt cx="0" cy="0"/>
+        </a:xfrm>
+      </p:grpSpPr>
+      <p:sp>
+        <p:nvSpPr>
+          <p:cNvPr id="2" name="Title 1">
+            <a:extLst>
+              <a:ext uri="{FF2B5EF4-FFF2-40B4-BE49-F238E27FC236}">
+                <a16:creationId xmlns:a16="http://schemas.microsoft.com/office/drawing/2014/main" id="{F5365765-9AD9-D0F3-3935-E61A2A115F31}"/>
+              </a:ext>
+            </a:extLst>
+          </p:cNvPr>
+          <p:cNvSpPr>
+            <a:spLocks noGrp="1"/>
+          </p:cNvSpPr>
+          <p:nvPr>
+            <p:ph type="title"/>
+          </p:nvPr>
+        </p:nvSpPr>
+        <p:spPr/>
+        <p:txBody>
+          <a:bodyPr/>
+          <a:lstStyle/>
+          <a:p>
+            <a:r>
+              <a:rPr lang="en-US" dirty="0"/>
+              <a:t>ADC Breakout Board</a:t>
+            </a:r>
+          </a:p>
+        </p:txBody>
+      </p:sp>
+      <p:sp>
+        <p:nvSpPr>
+          <p:cNvPr id="3" name="Content Placeholder 2">
+            <a:extLst>
+              <a:ext uri="{FF2B5EF4-FFF2-40B4-BE49-F238E27FC236}">
+                <a16:creationId xmlns:a16="http://schemas.microsoft.com/office/drawing/2014/main" id="{19D6FCAE-DC7C-077D-797B-3ACC9CBBDA84}"/>
+              </a:ext>
+            </a:extLst>
+          </p:cNvPr>
+          <p:cNvSpPr>
+            <a:spLocks noGrp="1"/>
+          </p:cNvSpPr>
+          <p:nvPr>
+            <p:ph sz="quarter" idx="13"/>
+          </p:nvPr>
+        </p:nvSpPr>
+        <p:spPr>
+          <a:xfrm>
+            <a:off x="841248" y="1536827"/>
+            <a:ext cx="10076688" cy="4479925"/>
+          </a:xfrm>
+        </p:spPr>
+        <p:txBody>
+          <a:bodyPr/>
+          <a:lstStyle/>
+          <a:p>
+            <a:r>
+              <a:rPr lang="en-US" dirty="0"/>
+              <a:t>Test isolated power rail</a:t>
+            </a:r>
+          </a:p>
+          <a:p>
+            <a:r>
+              <a:rPr lang="en-US" dirty="0"/>
+              <a:t>Ensure accurate readings given current</a:t>
+            </a:r>
+          </a:p>
+          <a:p>
+            <a:r>
+              <a:rPr lang="en-US" dirty="0"/>
+              <a:t>Work on software support for ADC</a:t>
+            </a:r>
+          </a:p>
+          <a:p>
+            <a:r>
+              <a:rPr lang="en-US" dirty="0"/>
+              <a:t>Feedback loop for output current</a:t>
+            </a:r>
+          </a:p>
+        </p:txBody>
+      </p:sp>
+      <p:sp>
+        <p:nvSpPr>
+          <p:cNvPr id="4" name="Slide Number Placeholder 3">
+            <a:extLst>
+              <a:ext uri="{FF2B5EF4-FFF2-40B4-BE49-F238E27FC236}">
+                <a16:creationId xmlns:a16="http://schemas.microsoft.com/office/drawing/2014/main" id="{A2A25E4D-0C19-CF84-7728-5B309132D7EA}"/>
+              </a:ext>
+            </a:extLst>
+          </p:cNvPr>
+          <p:cNvSpPr>
+            <a:spLocks noGrp="1"/>
+          </p:cNvSpPr>
+          <p:nvPr>
+            <p:ph type="sldNum" sz="quarter" idx="11"/>
+          </p:nvPr>
+        </p:nvSpPr>
+        <p:spPr/>
+        <p:txBody>
+          <a:bodyPr/>
+          <a:lstStyle/>
+          <a:p>
+            <a:fld id="{B67B645E-C5E5-4727-B977-D372A0AA71D9}" type="slidenum">
+              <a:rPr lang="en-US" smtClean="0"/>
+              <a:pPr/>
+              <a:t>10</a:t>
+            </a:fld>
+            <a:endParaRPr lang="en-US" dirty="0"/>
+          </a:p>
+        </p:txBody>
+      </p:sp>
+    </p:spTree>
+    <p:extLst>
+      <p:ext uri="{BB962C8B-B14F-4D97-AF65-F5344CB8AC3E}">
+        <p14:creationId xmlns:p14="http://schemas.microsoft.com/office/powerpoint/2010/main" val="3822539156"/>
+      </p:ext>
+    </p:extLst>
+  </p:cSld>
+  <p:clrMapOvr>
+    <a:masterClrMapping/>
+  </p:clrMapOvr>
+</p:sld>
+</file>
+
+<file path=ppt/slides/slide11.xml><?xml version="1.0" encoding="utf-8"?>
+<p:sld xmlns:a="http://schemas.openxmlformats.org/drawingml/2006/main" xmlns:r="http://schemas.openxmlformats.org/officeDocument/2006/relationships" xmlns:p="http://schemas.openxmlformats.org/presentationml/2006/main">
+  <p:cSld>
+    <p:spTree>
+      <p:nvGrpSpPr>
         <p:cNvPr id="1" name="">
           <a:extLst>
             <a:ext uri="{FF2B5EF4-FFF2-40B4-BE49-F238E27FC236}">
@@ -7765,7 +7905,7 @@
                   <a:spcPts val="600"/>
                 </a:spcAft>
               </a:pPr>
-              <a:t>10</a:t>
+              <a:t>11</a:t>
             </a:fld>
             <a:endParaRPr lang="en-US"/>
           </a:p>
@@ -7775,147 +7915,6 @@
     <p:extLst>
       <p:ext uri="{BB962C8B-B14F-4D97-AF65-F5344CB8AC3E}">
         <p14:creationId xmlns:p14="http://schemas.microsoft.com/office/powerpoint/2010/main" val="4009381967"/>
-      </p:ext>
-    </p:extLst>
-  </p:cSld>
-  <p:clrMapOvr>
-    <a:masterClrMapping/>
-  </p:clrMapOvr>
-</p:sld>
-</file>
-
-<file path=ppt/slides/slide11.xml><?xml version="1.0" encoding="utf-8"?>
-<p:sld xmlns:a="http://schemas.openxmlformats.org/drawingml/2006/main" xmlns:r="http://schemas.openxmlformats.org/officeDocument/2006/relationships" xmlns:p="http://schemas.openxmlformats.org/presentationml/2006/main">
-  <p:cSld>
-    <p:spTree>
-      <p:nvGrpSpPr>
-        <p:cNvPr id="1" name=""/>
-        <p:cNvGrpSpPr/>
-        <p:nvPr/>
-      </p:nvGrpSpPr>
-      <p:grpSpPr>
-        <a:xfrm>
-          <a:off x="0" y="0"/>
-          <a:ext cx="0" cy="0"/>
-          <a:chOff x="0" y="0"/>
-          <a:chExt cx="0" cy="0"/>
-        </a:xfrm>
-      </p:grpSpPr>
-      <p:sp>
-        <p:nvSpPr>
-          <p:cNvPr id="2" name="Title 1">
-            <a:extLst>
-              <a:ext uri="{FF2B5EF4-FFF2-40B4-BE49-F238E27FC236}">
-                <a16:creationId xmlns:a16="http://schemas.microsoft.com/office/drawing/2014/main" id="{AA3948A8-F29C-F927-B681-BA4E85BF157D}"/>
-              </a:ext>
-            </a:extLst>
-          </p:cNvPr>
-          <p:cNvSpPr>
-            <a:spLocks noGrp="1"/>
-          </p:cNvSpPr>
-          <p:nvPr>
-            <p:ph type="title"/>
-          </p:nvPr>
-        </p:nvSpPr>
-        <p:spPr/>
-        <p:txBody>
-          <a:bodyPr/>
-          <a:lstStyle/>
-          <a:p>
-            <a:r>
-              <a:rPr lang="en-US" dirty="0"/>
-              <a:t>Switch to Four Small DDS</a:t>
-            </a:r>
-          </a:p>
-        </p:txBody>
-      </p:sp>
-      <p:sp>
-        <p:nvSpPr>
-          <p:cNvPr id="3" name="Content Placeholder 2">
-            <a:extLst>
-              <a:ext uri="{FF2B5EF4-FFF2-40B4-BE49-F238E27FC236}">
-                <a16:creationId xmlns:a16="http://schemas.microsoft.com/office/drawing/2014/main" id="{BCA7816C-28ED-63DB-CB3B-F43A9840EEC3}"/>
-              </a:ext>
-            </a:extLst>
-          </p:cNvPr>
-          <p:cNvSpPr>
-            <a:spLocks noGrp="1"/>
-          </p:cNvSpPr>
-          <p:nvPr>
-            <p:ph sz="quarter" idx="13"/>
-          </p:nvPr>
-        </p:nvSpPr>
-        <p:spPr>
-          <a:xfrm>
-            <a:off x="841248" y="1536827"/>
-            <a:ext cx="10479024" cy="4479925"/>
-          </a:xfrm>
-        </p:spPr>
-        <p:txBody>
-          <a:bodyPr/>
-          <a:lstStyle/>
-          <a:p>
-            <a:r>
-              <a:rPr lang="en-US" dirty="0"/>
-              <a:t>Big DDS great in theory because it has a lot of features, bad in practice because it has a lot of features (over-</a:t>
-            </a:r>
-            <a:r>
-              <a:rPr lang="en-US" dirty="0" err="1"/>
-              <a:t>speced</a:t>
-            </a:r>
-            <a:r>
-              <a:rPr lang="en-US" dirty="0"/>
-              <a:t>)</a:t>
-            </a:r>
-          </a:p>
-          <a:p>
-            <a:r>
-              <a:rPr lang="en-US" dirty="0"/>
-              <a:t>Smaller DDS have more voltage focus</a:t>
-            </a:r>
-          </a:p>
-          <a:p>
-            <a:r>
-              <a:rPr lang="en-US" dirty="0"/>
-              <a:t>DDS are expensive, but reduce load on the MCU</a:t>
-            </a:r>
-          </a:p>
-        </p:txBody>
-      </p:sp>
-      <p:sp>
-        <p:nvSpPr>
-          <p:cNvPr id="4" name="Slide Number Placeholder 3">
-            <a:extLst>
-              <a:ext uri="{FF2B5EF4-FFF2-40B4-BE49-F238E27FC236}">
-                <a16:creationId xmlns:a16="http://schemas.microsoft.com/office/drawing/2014/main" id="{4E650EE2-84B5-C4CA-450E-5C0A3AB523B6}"/>
-              </a:ext>
-            </a:extLst>
-          </p:cNvPr>
-          <p:cNvSpPr>
-            <a:spLocks noGrp="1"/>
-          </p:cNvSpPr>
-          <p:nvPr>
-            <p:ph type="sldNum" sz="quarter" idx="11"/>
-          </p:nvPr>
-        </p:nvSpPr>
-        <p:spPr/>
-        <p:txBody>
-          <a:bodyPr/>
-          <a:lstStyle/>
-          <a:p>
-            <a:fld id="{B67B645E-C5E5-4727-B977-D372A0AA71D9}" type="slidenum">
-              <a:rPr lang="en-US" smtClean="0"/>
-              <a:pPr/>
-              <a:t>11</a:t>
-            </a:fld>
-            <a:endParaRPr lang="en-US" dirty="0"/>
-          </a:p>
-        </p:txBody>
-      </p:sp>
-    </p:spTree>
-    <p:extLst>
-      <p:ext uri="{BB962C8B-B14F-4D97-AF65-F5344CB8AC3E}">
-        <p14:creationId xmlns:p14="http://schemas.microsoft.com/office/powerpoint/2010/main" val="3455198794"/>
       </p:ext>
     </p:extLst>
   </p:cSld>
@@ -7947,7 +7946,7 @@
           <p:cNvPr id="2" name="Title 1">
             <a:extLst>
               <a:ext uri="{FF2B5EF4-FFF2-40B4-BE49-F238E27FC236}">
-                <a16:creationId xmlns:a16="http://schemas.microsoft.com/office/drawing/2014/main" id="{566DB56A-EFC3-295C-8C50-6E451A84F990}"/>
+                <a16:creationId xmlns:a16="http://schemas.microsoft.com/office/drawing/2014/main" id="{AA3948A8-F29C-F927-B681-BA4E85BF157D}"/>
               </a:ext>
             </a:extLst>
           </p:cNvPr>
@@ -7965,46 +7964,70 @@
           <a:p>
             <a:r>
               <a:rPr lang="en-US" dirty="0"/>
-              <a:t>DDS Breakout Board</a:t>
+              <a:t>Switch to Four Small DDS</a:t>
             </a:r>
           </a:p>
         </p:txBody>
       </p:sp>
-      <p:pic>
-        <p:nvPicPr>
-          <p:cNvPr id="6" name="Content Placeholder 5" descr="A green circuit board with white text&#10;&#10;AI-generated content may be incorrect.">
-            <a:extLst>
-              <a:ext uri="{FF2B5EF4-FFF2-40B4-BE49-F238E27FC236}">
-                <a16:creationId xmlns:a16="http://schemas.microsoft.com/office/drawing/2014/main" id="{B107CD61-9101-1349-9D76-551746A49B42}"/>
-              </a:ext>
-            </a:extLst>
-          </p:cNvPr>
-          <p:cNvPicPr>
-            <a:picLocks noGrp="1" noChangeAspect="1"/>
-          </p:cNvPicPr>
+      <p:sp>
+        <p:nvSpPr>
+          <p:cNvPr id="3" name="Content Placeholder 2">
+            <a:extLst>
+              <a:ext uri="{FF2B5EF4-FFF2-40B4-BE49-F238E27FC236}">
+                <a16:creationId xmlns:a16="http://schemas.microsoft.com/office/drawing/2014/main" id="{BCA7816C-28ED-63DB-CB3B-F43A9840EEC3}"/>
+              </a:ext>
+            </a:extLst>
+          </p:cNvPr>
+          <p:cNvSpPr>
+            <a:spLocks noGrp="1"/>
+          </p:cNvSpPr>
           <p:nvPr>
             <p:ph sz="quarter" idx="13"/>
           </p:nvPr>
-        </p:nvPicPr>
-        <p:blipFill>
-          <a:blip r:embed="rId2"/>
-          <a:stretch>
-            <a:fillRect/>
-          </a:stretch>
-        </p:blipFill>
-        <p:spPr>
-          <a:xfrm>
-            <a:off x="3444106" y="1189037"/>
-            <a:ext cx="5303787" cy="4479925"/>
-          </a:xfrm>
-        </p:spPr>
-      </p:pic>
+        </p:nvSpPr>
+        <p:spPr>
+          <a:xfrm>
+            <a:off x="841248" y="1536827"/>
+            <a:ext cx="10479024" cy="4479925"/>
+          </a:xfrm>
+        </p:spPr>
+        <p:txBody>
+          <a:bodyPr/>
+          <a:lstStyle/>
+          <a:p>
+            <a:r>
+              <a:rPr lang="en-US" dirty="0"/>
+              <a:t>Big DDS great in theory because it has a lot of features, bad in practice because it has a lot of features (over-</a:t>
+            </a:r>
+            <a:r>
+              <a:rPr lang="en-US" dirty="0" err="1"/>
+              <a:t>speced</a:t>
+            </a:r>
+            <a:r>
+              <a:rPr lang="en-US" dirty="0"/>
+              <a:t>)</a:t>
+            </a:r>
+          </a:p>
+          <a:p>
+            <a:r>
+              <a:rPr lang="en-US" dirty="0"/>
+              <a:t>Smaller DDS have more voltage focus</a:t>
+            </a:r>
+          </a:p>
+          <a:p>
+            <a:r>
+              <a:rPr lang="en-US" dirty="0"/>
+              <a:t>DDS are expensive, but reduce load on the MCU</a:t>
+            </a:r>
+          </a:p>
+        </p:txBody>
+      </p:sp>
       <p:sp>
         <p:nvSpPr>
           <p:cNvPr id="4" name="Slide Number Placeholder 3">
             <a:extLst>
               <a:ext uri="{FF2B5EF4-FFF2-40B4-BE49-F238E27FC236}">
-                <a16:creationId xmlns:a16="http://schemas.microsoft.com/office/drawing/2014/main" id="{EE6D5664-4773-67A3-2574-9D02515837D4}"/>
+                <a16:creationId xmlns:a16="http://schemas.microsoft.com/office/drawing/2014/main" id="{4E650EE2-84B5-C4CA-450E-5C0A3AB523B6}"/>
               </a:ext>
             </a:extLst>
           </p:cNvPr>
@@ -8032,7 +8055,7 @@
     </p:spTree>
     <p:extLst>
       <p:ext uri="{BB962C8B-B14F-4D97-AF65-F5344CB8AC3E}">
-        <p14:creationId xmlns:p14="http://schemas.microsoft.com/office/powerpoint/2010/main" val="3495993409"/>
+        <p14:creationId xmlns:p14="http://schemas.microsoft.com/office/powerpoint/2010/main" val="3455198794"/>
       </p:ext>
     </p:extLst>
   </p:cSld>
@@ -8064,7 +8087,7 @@
           <p:cNvPr id="2" name="Title 1">
             <a:extLst>
               <a:ext uri="{FF2B5EF4-FFF2-40B4-BE49-F238E27FC236}">
-                <a16:creationId xmlns:a16="http://schemas.microsoft.com/office/drawing/2014/main" id="{0D3760E7-D27A-1C0A-6CD5-364C193F6758}"/>
+                <a16:creationId xmlns:a16="http://schemas.microsoft.com/office/drawing/2014/main" id="{566DB56A-EFC3-295C-8C50-6E451A84F990}"/>
               </a:ext>
             </a:extLst>
           </p:cNvPr>
@@ -8082,78 +8105,46 @@
           <a:p>
             <a:r>
               <a:rPr lang="en-US" dirty="0"/>
-              <a:t>Budget</a:t>
+              <a:t>DDS Breakout Board</a:t>
             </a:r>
           </a:p>
         </p:txBody>
       </p:sp>
-      <p:sp>
-        <p:nvSpPr>
-          <p:cNvPr id="3" name="Content Placeholder 2">
-            <a:extLst>
-              <a:ext uri="{FF2B5EF4-FFF2-40B4-BE49-F238E27FC236}">
-                <a16:creationId xmlns:a16="http://schemas.microsoft.com/office/drawing/2014/main" id="{C699354B-C796-1926-1CEE-088B8D9B86D2}"/>
-              </a:ext>
-            </a:extLst>
-          </p:cNvPr>
-          <p:cNvSpPr>
-            <a:spLocks noGrp="1"/>
-          </p:cNvSpPr>
+      <p:pic>
+        <p:nvPicPr>
+          <p:cNvPr id="6" name="Content Placeholder 5" descr="A green circuit board with white text&#10;&#10;AI-generated content may be incorrect.">
+            <a:extLst>
+              <a:ext uri="{FF2B5EF4-FFF2-40B4-BE49-F238E27FC236}">
+                <a16:creationId xmlns:a16="http://schemas.microsoft.com/office/drawing/2014/main" id="{B107CD61-9101-1349-9D76-551746A49B42}"/>
+              </a:ext>
+            </a:extLst>
+          </p:cNvPr>
+          <p:cNvPicPr>
+            <a:picLocks noGrp="1" noChangeAspect="1"/>
+          </p:cNvPicPr>
           <p:nvPr>
             <p:ph sz="quarter" idx="13"/>
           </p:nvPr>
-        </p:nvSpPr>
-        <p:spPr/>
-        <p:txBody>
-          <a:bodyPr/>
-          <a:lstStyle/>
-          <a:p>
-            <a:pPr marL="0" indent="0">
-              <a:buNone/>
-            </a:pPr>
-            <a:r>
-              <a:rPr lang="en-US" dirty="0"/>
-              <a:t>Current Expenses :</a:t>
-            </a:r>
-          </a:p>
-          <a:p>
-            <a:r>
-              <a:rPr lang="en-US" dirty="0"/>
-              <a:t>DDS Test Board: $33</a:t>
-            </a:r>
-          </a:p>
-          <a:p>
-            <a:r>
-              <a:rPr lang="en-US" dirty="0"/>
-              <a:t>Component Order: $</a:t>
-            </a:r>
-          </a:p>
-          <a:p>
-            <a:r>
-              <a:rPr lang="en-US" dirty="0"/>
-              <a:t>Battery Order: $</a:t>
-            </a:r>
-          </a:p>
-          <a:p>
-            <a:endParaRPr lang="en-US" dirty="0"/>
-          </a:p>
-          <a:p>
-            <a:pPr marL="0" indent="0">
-              <a:buNone/>
-            </a:pPr>
-            <a:r>
-              <a:rPr lang="en-US" dirty="0"/>
-              <a:t>Total: $</a:t>
-            </a:r>
-          </a:p>
-        </p:txBody>
-      </p:sp>
+        </p:nvPicPr>
+        <p:blipFill>
+          <a:blip r:embed="rId2"/>
+          <a:stretch>
+            <a:fillRect/>
+          </a:stretch>
+        </p:blipFill>
+        <p:spPr>
+          <a:xfrm>
+            <a:off x="3444106" y="1189037"/>
+            <a:ext cx="5303787" cy="4479925"/>
+          </a:xfrm>
+        </p:spPr>
+      </p:pic>
       <p:sp>
         <p:nvSpPr>
           <p:cNvPr id="4" name="Slide Number Placeholder 3">
             <a:extLst>
               <a:ext uri="{FF2B5EF4-FFF2-40B4-BE49-F238E27FC236}">
-                <a16:creationId xmlns:a16="http://schemas.microsoft.com/office/drawing/2014/main" id="{53EC9821-24B7-EE51-078D-0B7963AC20BB}"/>
+                <a16:creationId xmlns:a16="http://schemas.microsoft.com/office/drawing/2014/main" id="{EE6D5664-4773-67A3-2574-9D02515837D4}"/>
               </a:ext>
             </a:extLst>
           </p:cNvPr>
@@ -8181,7 +8172,7 @@
     </p:spTree>
     <p:extLst>
       <p:ext uri="{BB962C8B-B14F-4D97-AF65-F5344CB8AC3E}">
-        <p14:creationId xmlns:p14="http://schemas.microsoft.com/office/powerpoint/2010/main" val="2571095337"/>
+        <p14:creationId xmlns:p14="http://schemas.microsoft.com/office/powerpoint/2010/main" val="3495993409"/>
       </p:ext>
     </p:extLst>
   </p:cSld>
@@ -8213,7 +8204,7 @@
           <p:cNvPr id="2" name="Title 1">
             <a:extLst>
               <a:ext uri="{FF2B5EF4-FFF2-40B4-BE49-F238E27FC236}">
-                <a16:creationId xmlns:a16="http://schemas.microsoft.com/office/drawing/2014/main" id="{A77F160B-AF27-B7B9-795A-6950EC477D75}"/>
+                <a16:creationId xmlns:a16="http://schemas.microsoft.com/office/drawing/2014/main" id="{0D3760E7-D27A-1C0A-6CD5-364C193F6758}"/>
               </a:ext>
             </a:extLst>
           </p:cNvPr>
@@ -8231,7 +8222,7 @@
           <a:p>
             <a:r>
               <a:rPr lang="en-US" dirty="0"/>
-              <a:t>Challenges so far</a:t>
+              <a:t>Budget</a:t>
             </a:r>
           </a:p>
         </p:txBody>
@@ -8241,7 +8232,7 @@
           <p:cNvPr id="3" name="Content Placeholder 2">
             <a:extLst>
               <a:ext uri="{FF2B5EF4-FFF2-40B4-BE49-F238E27FC236}">
-                <a16:creationId xmlns:a16="http://schemas.microsoft.com/office/drawing/2014/main" id="{D51F76C4-2D7C-3DF9-F61F-30FCC2A901ED}"/>
+                <a16:creationId xmlns:a16="http://schemas.microsoft.com/office/drawing/2014/main" id="{C699354B-C796-1926-1CEE-088B8D9B86D2}"/>
               </a:ext>
             </a:extLst>
           </p:cNvPr>
@@ -8252,28 +8243,52 @@
             <p:ph sz="quarter" idx="13"/>
           </p:nvPr>
         </p:nvSpPr>
-        <p:spPr>
-          <a:xfrm>
-            <a:off x="841248" y="1536827"/>
-            <a:ext cx="10076688" cy="4479925"/>
-          </a:xfrm>
-        </p:spPr>
+        <p:spPr/>
         <p:txBody>
           <a:bodyPr/>
           <a:lstStyle/>
           <a:p>
+            <a:pPr marL="0" indent="0">
+              <a:buNone/>
+            </a:pPr>
             <a:r>
               <a:rPr lang="en-US" dirty="0"/>
-              <a:t>Space is extremely limited</a:t>
+              <a:t>Current Expenses :</a:t>
             </a:r>
           </a:p>
           <a:p>
             <a:r>
               <a:rPr lang="en-US" dirty="0"/>
-              <a:t>Some components are hard to find</a:t>
-            </a:r>
-          </a:p>
-          <a:p>
+              <a:t>DDS Test Board: $33</a:t>
+            </a:r>
+          </a:p>
+          <a:p>
+            <a:r>
+              <a:rPr lang="en-US" dirty="0"/>
+              <a:t>Component Order: $140</a:t>
+            </a:r>
+          </a:p>
+          <a:p>
+            <a:r>
+              <a:rPr lang="en-US" dirty="0"/>
+              <a:t>Battery Order: $44</a:t>
+            </a:r>
+          </a:p>
+          <a:p>
+            <a:endParaRPr lang="en-US" dirty="0"/>
+          </a:p>
+          <a:p>
+            <a:pPr marL="0" indent="0">
+              <a:buNone/>
+            </a:pPr>
+            <a:r>
+              <a:rPr lang="en-US" dirty="0"/>
+              <a:t>Total</a:t>
+            </a:r>
+            <a:r>
+              <a:rPr lang="en-US"/>
+              <a:t>: $217</a:t>
+            </a:r>
             <a:endParaRPr lang="en-US" dirty="0"/>
           </a:p>
         </p:txBody>
@@ -8283,7 +8298,7 @@
           <p:cNvPr id="4" name="Slide Number Placeholder 3">
             <a:extLst>
               <a:ext uri="{FF2B5EF4-FFF2-40B4-BE49-F238E27FC236}">
-                <a16:creationId xmlns:a16="http://schemas.microsoft.com/office/drawing/2014/main" id="{8DC54A4F-408F-2AE8-E17D-8D70EF316CD6}"/>
+                <a16:creationId xmlns:a16="http://schemas.microsoft.com/office/drawing/2014/main" id="{53EC9821-24B7-EE51-078D-0B7963AC20BB}"/>
               </a:ext>
             </a:extLst>
           </p:cNvPr>
@@ -8311,7 +8326,7 @@
     </p:spTree>
     <p:extLst>
       <p:ext uri="{BB962C8B-B14F-4D97-AF65-F5344CB8AC3E}">
-        <p14:creationId xmlns:p14="http://schemas.microsoft.com/office/powerpoint/2010/main" val="1809417748"/>
+        <p14:creationId xmlns:p14="http://schemas.microsoft.com/office/powerpoint/2010/main" val="2571095337"/>
       </p:ext>
     </p:extLst>
   </p:cSld>
@@ -8343,7 +8358,7 @@
           <p:cNvPr id="2" name="Title 1">
             <a:extLst>
               <a:ext uri="{FF2B5EF4-FFF2-40B4-BE49-F238E27FC236}">
-                <a16:creationId xmlns:a16="http://schemas.microsoft.com/office/drawing/2014/main" id="{E178EF87-E3BB-A226-DCCF-2D45CE9BE47B}"/>
+                <a16:creationId xmlns:a16="http://schemas.microsoft.com/office/drawing/2014/main" id="{A77F160B-AF27-B7B9-795A-6950EC477D75}"/>
               </a:ext>
             </a:extLst>
           </p:cNvPr>
@@ -8361,7 +8376,7 @@
           <a:p>
             <a:r>
               <a:rPr lang="en-US" dirty="0"/>
-              <a:t>Immediate Plan</a:t>
+              <a:t>Challenges so far</a:t>
             </a:r>
           </a:p>
         </p:txBody>
@@ -8371,7 +8386,7 @@
           <p:cNvPr id="3" name="Content Placeholder 2">
             <a:extLst>
               <a:ext uri="{FF2B5EF4-FFF2-40B4-BE49-F238E27FC236}">
-                <a16:creationId xmlns:a16="http://schemas.microsoft.com/office/drawing/2014/main" id="{1F4E9115-94A4-A2F8-8B11-947907F62B45}"/>
+                <a16:creationId xmlns:a16="http://schemas.microsoft.com/office/drawing/2014/main" id="{D51F76C4-2D7C-3DF9-F61F-30FCC2A901ED}"/>
               </a:ext>
             </a:extLst>
           </p:cNvPr>
@@ -8385,7 +8400,7 @@
         <p:spPr>
           <a:xfrm>
             <a:off x="841248" y="1536827"/>
-            <a:ext cx="10479024" cy="4479925"/>
+            <a:ext cx="10076688" cy="4479925"/>
           </a:xfrm>
         </p:spPr>
         <p:txBody>
@@ -8394,25 +8409,13 @@
           <a:p>
             <a:r>
               <a:rPr lang="en-US" dirty="0"/>
-              <a:t>Layout completed rooms</a:t>
+              <a:t>Space is extremely limited</a:t>
             </a:r>
           </a:p>
           <a:p>
             <a:r>
               <a:rPr lang="en-US" dirty="0"/>
-              <a:t>Get flyback stuff working</a:t>
-            </a:r>
-          </a:p>
-          <a:p>
-            <a:r>
-              <a:rPr lang="en-US" dirty="0"/>
-              <a:t>Battery</a:t>
-            </a:r>
-          </a:p>
-          <a:p>
-            <a:r>
-              <a:rPr lang="en-US" dirty="0"/>
-              <a:t>ADC software</a:t>
+              <a:t>Some components are hard to find</a:t>
             </a:r>
           </a:p>
           <a:p>
@@ -8425,7 +8428,7 @@
           <p:cNvPr id="4" name="Slide Number Placeholder 3">
             <a:extLst>
               <a:ext uri="{FF2B5EF4-FFF2-40B4-BE49-F238E27FC236}">
-                <a16:creationId xmlns:a16="http://schemas.microsoft.com/office/drawing/2014/main" id="{305C2303-290B-35FB-A4CD-104764401AD5}"/>
+                <a16:creationId xmlns:a16="http://schemas.microsoft.com/office/drawing/2014/main" id="{8DC54A4F-408F-2AE8-E17D-8D70EF316CD6}"/>
               </a:ext>
             </a:extLst>
           </p:cNvPr>
@@ -8445,6 +8448,148 @@
               <a:rPr lang="en-US" smtClean="0"/>
               <a:pPr/>
               <a:t>15</a:t>
+            </a:fld>
+            <a:endParaRPr lang="en-US" dirty="0"/>
+          </a:p>
+        </p:txBody>
+      </p:sp>
+    </p:spTree>
+    <p:extLst>
+      <p:ext uri="{BB962C8B-B14F-4D97-AF65-F5344CB8AC3E}">
+        <p14:creationId xmlns:p14="http://schemas.microsoft.com/office/powerpoint/2010/main" val="1809417748"/>
+      </p:ext>
+    </p:extLst>
+  </p:cSld>
+  <p:clrMapOvr>
+    <a:masterClrMapping/>
+  </p:clrMapOvr>
+</p:sld>
+</file>
+
+<file path=ppt/slides/slide16.xml><?xml version="1.0" encoding="utf-8"?>
+<p:sld xmlns:a="http://schemas.openxmlformats.org/drawingml/2006/main" xmlns:r="http://schemas.openxmlformats.org/officeDocument/2006/relationships" xmlns:p="http://schemas.openxmlformats.org/presentationml/2006/main">
+  <p:cSld>
+    <p:spTree>
+      <p:nvGrpSpPr>
+        <p:cNvPr id="1" name=""/>
+        <p:cNvGrpSpPr/>
+        <p:nvPr/>
+      </p:nvGrpSpPr>
+      <p:grpSpPr>
+        <a:xfrm>
+          <a:off x="0" y="0"/>
+          <a:ext cx="0" cy="0"/>
+          <a:chOff x="0" y="0"/>
+          <a:chExt cx="0" cy="0"/>
+        </a:xfrm>
+      </p:grpSpPr>
+      <p:sp>
+        <p:nvSpPr>
+          <p:cNvPr id="2" name="Title 1">
+            <a:extLst>
+              <a:ext uri="{FF2B5EF4-FFF2-40B4-BE49-F238E27FC236}">
+                <a16:creationId xmlns:a16="http://schemas.microsoft.com/office/drawing/2014/main" id="{E178EF87-E3BB-A226-DCCF-2D45CE9BE47B}"/>
+              </a:ext>
+            </a:extLst>
+          </p:cNvPr>
+          <p:cNvSpPr>
+            <a:spLocks noGrp="1"/>
+          </p:cNvSpPr>
+          <p:nvPr>
+            <p:ph type="title"/>
+          </p:nvPr>
+        </p:nvSpPr>
+        <p:spPr/>
+        <p:txBody>
+          <a:bodyPr/>
+          <a:lstStyle/>
+          <a:p>
+            <a:r>
+              <a:rPr lang="en-US" dirty="0"/>
+              <a:t>Immediate Plan</a:t>
+            </a:r>
+          </a:p>
+        </p:txBody>
+      </p:sp>
+      <p:sp>
+        <p:nvSpPr>
+          <p:cNvPr id="3" name="Content Placeholder 2">
+            <a:extLst>
+              <a:ext uri="{FF2B5EF4-FFF2-40B4-BE49-F238E27FC236}">
+                <a16:creationId xmlns:a16="http://schemas.microsoft.com/office/drawing/2014/main" id="{1F4E9115-94A4-A2F8-8B11-947907F62B45}"/>
+              </a:ext>
+            </a:extLst>
+          </p:cNvPr>
+          <p:cNvSpPr>
+            <a:spLocks noGrp="1"/>
+          </p:cNvSpPr>
+          <p:nvPr>
+            <p:ph sz="quarter" idx="13"/>
+          </p:nvPr>
+        </p:nvSpPr>
+        <p:spPr>
+          <a:xfrm>
+            <a:off x="841248" y="1536827"/>
+            <a:ext cx="10479024" cy="4479925"/>
+          </a:xfrm>
+        </p:spPr>
+        <p:txBody>
+          <a:bodyPr/>
+          <a:lstStyle/>
+          <a:p>
+            <a:r>
+              <a:rPr lang="en-US" dirty="0"/>
+              <a:t>Layout completed rooms</a:t>
+            </a:r>
+          </a:p>
+          <a:p>
+            <a:r>
+              <a:rPr lang="en-US" dirty="0"/>
+              <a:t>Get flyback stuff working</a:t>
+            </a:r>
+          </a:p>
+          <a:p>
+            <a:r>
+              <a:rPr lang="en-US" dirty="0"/>
+              <a:t>Battery</a:t>
+            </a:r>
+          </a:p>
+          <a:p>
+            <a:r>
+              <a:rPr lang="en-US" dirty="0"/>
+              <a:t>ADC software</a:t>
+            </a:r>
+          </a:p>
+          <a:p>
+            <a:endParaRPr lang="en-US" dirty="0"/>
+          </a:p>
+        </p:txBody>
+      </p:sp>
+      <p:sp>
+        <p:nvSpPr>
+          <p:cNvPr id="4" name="Slide Number Placeholder 3">
+            <a:extLst>
+              <a:ext uri="{FF2B5EF4-FFF2-40B4-BE49-F238E27FC236}">
+                <a16:creationId xmlns:a16="http://schemas.microsoft.com/office/drawing/2014/main" id="{305C2303-290B-35FB-A4CD-104764401AD5}"/>
+              </a:ext>
+            </a:extLst>
+          </p:cNvPr>
+          <p:cNvSpPr>
+            <a:spLocks noGrp="1"/>
+          </p:cNvSpPr>
+          <p:nvPr>
+            <p:ph type="sldNum" sz="quarter" idx="11"/>
+          </p:nvPr>
+        </p:nvSpPr>
+        <p:spPr/>
+        <p:txBody>
+          <a:bodyPr/>
+          <a:lstStyle/>
+          <a:p>
+            <a:fld id="{B67B645E-C5E5-4727-B977-D372A0AA71D9}" type="slidenum">
+              <a:rPr lang="en-US" smtClean="0"/>
+              <a:pPr/>
+              <a:t>16</a:t>
             </a:fld>
             <a:endParaRPr lang="en-US" dirty="0"/>
           </a:p>
@@ -8463,7 +8608,7 @@
 </p:sld>
 </file>
 
-<file path=ppt/slides/slide16.xml><?xml version="1.0" encoding="utf-8"?>
+<file path=ppt/slides/slide17.xml><?xml version="1.0" encoding="utf-8"?>
 <p:sld xmlns:a="http://schemas.openxmlformats.org/drawingml/2006/main" xmlns:r="http://schemas.openxmlformats.org/officeDocument/2006/relationships" xmlns:p="http://schemas.openxmlformats.org/presentationml/2006/main">
   <p:cSld>
     <p:spTree>
@@ -8854,31 +8999,35 @@
           </a:p>
         </p:txBody>
       </p:sp>
-      <p:sp>
-        <p:nvSpPr>
-          <p:cNvPr id="3" name="Content Placeholder 2">
-            <a:extLst>
-              <a:ext uri="{FF2B5EF4-FFF2-40B4-BE49-F238E27FC236}">
-                <a16:creationId xmlns:a16="http://schemas.microsoft.com/office/drawing/2014/main" id="{16F71690-2625-27A6-3364-1CE5431ED24D}"/>
-              </a:ext>
-            </a:extLst>
-          </p:cNvPr>
-          <p:cNvSpPr>
-            <a:spLocks noGrp="1"/>
-          </p:cNvSpPr>
+      <p:pic>
+        <p:nvPicPr>
+          <p:cNvPr id="6" name="Content Placeholder 5" descr="A person connecting wires to a circuit board&#10;&#10;AI-generated content may be incorrect.">
+            <a:extLst>
+              <a:ext uri="{FF2B5EF4-FFF2-40B4-BE49-F238E27FC236}">
+                <a16:creationId xmlns:a16="http://schemas.microsoft.com/office/drawing/2014/main" id="{CD5F9C93-EE54-6C3B-999F-C81D14A681A6}"/>
+              </a:ext>
+            </a:extLst>
+          </p:cNvPr>
+          <p:cNvPicPr>
+            <a:picLocks noGrp="1" noChangeAspect="1"/>
+          </p:cNvPicPr>
           <p:nvPr>
             <p:ph sz="quarter" idx="13"/>
           </p:nvPr>
-        </p:nvSpPr>
-        <p:spPr/>
-        <p:txBody>
-          <a:bodyPr/>
-          <a:lstStyle/>
-          <a:p>
-            <a:endParaRPr lang="en-US"/>
-          </a:p>
-        </p:txBody>
-      </p:sp>
+        </p:nvPicPr>
+        <p:blipFill>
+          <a:blip r:embed="rId2"/>
+          <a:stretch>
+            <a:fillRect/>
+          </a:stretch>
+        </p:blipFill>
+        <p:spPr>
+          <a:xfrm>
+            <a:off x="4585891" y="1536827"/>
+            <a:ext cx="3359943" cy="4479925"/>
+          </a:xfrm>
+        </p:spPr>
+      </p:pic>
       <p:sp>
         <p:nvSpPr>
           <p:cNvPr id="4" name="Slide Number Placeholder 3">
@@ -8944,7 +9093,7 @@
           <p:cNvPr id="2" name="Title 1">
             <a:extLst>
               <a:ext uri="{FF2B5EF4-FFF2-40B4-BE49-F238E27FC236}">
-                <a16:creationId xmlns:a16="http://schemas.microsoft.com/office/drawing/2014/main" id="{76D3C611-5B79-FFE4-35B2-367640840AD0}"/>
+                <a16:creationId xmlns:a16="http://schemas.microsoft.com/office/drawing/2014/main" id="{DB0CE383-36B3-6112-B61E-5B8F83655CD7}"/>
               </a:ext>
             </a:extLst>
           </p:cNvPr>
@@ -8962,46 +9111,42 @@
           <a:p>
             <a:r>
               <a:rPr lang="en-US" dirty="0"/>
-              <a:t>DC-DC Converter</a:t>
+              <a:t>Flyback Updates</a:t>
             </a:r>
           </a:p>
         </p:txBody>
       </p:sp>
-      <p:pic>
-        <p:nvPicPr>
-          <p:cNvPr id="6" name="Content Placeholder 5" descr="A computer chip on a grey surface&#10;&#10;AI-generated content may be incorrect.">
-            <a:extLst>
-              <a:ext uri="{FF2B5EF4-FFF2-40B4-BE49-F238E27FC236}">
-                <a16:creationId xmlns:a16="http://schemas.microsoft.com/office/drawing/2014/main" id="{CF13FD14-684D-9534-ADD5-4602E42C32A9}"/>
-              </a:ext>
-            </a:extLst>
-          </p:cNvPr>
-          <p:cNvPicPr>
-            <a:picLocks noGrp="1" noChangeAspect="1"/>
-          </p:cNvPicPr>
+      <p:sp>
+        <p:nvSpPr>
+          <p:cNvPr id="3" name="Content Placeholder 2">
+            <a:extLst>
+              <a:ext uri="{FF2B5EF4-FFF2-40B4-BE49-F238E27FC236}">
+                <a16:creationId xmlns:a16="http://schemas.microsoft.com/office/drawing/2014/main" id="{F6D33DB6-FEDF-A04C-BAC3-7C4487FD7899}"/>
+              </a:ext>
+            </a:extLst>
+          </p:cNvPr>
+          <p:cNvSpPr>
+            <a:spLocks noGrp="1"/>
+          </p:cNvSpPr>
           <p:nvPr>
             <p:ph sz="quarter" idx="13"/>
           </p:nvPr>
-        </p:nvPicPr>
-        <p:blipFill>
-          <a:blip r:embed="rId2"/>
-          <a:stretch>
-            <a:fillRect/>
-          </a:stretch>
-        </p:blipFill>
-        <p:spPr>
-          <a:xfrm>
-            <a:off x="1057719" y="1399032"/>
-            <a:ext cx="10076561" cy="5199890"/>
-          </a:xfrm>
-        </p:spPr>
-      </p:pic>
+        </p:nvSpPr>
+        <p:spPr/>
+        <p:txBody>
+          <a:bodyPr/>
+          <a:lstStyle/>
+          <a:p>
+            <a:endParaRPr lang="en-US"/>
+          </a:p>
+        </p:txBody>
+      </p:sp>
       <p:sp>
         <p:nvSpPr>
           <p:cNvPr id="4" name="Slide Number Placeholder 3">
             <a:extLst>
               <a:ext uri="{FF2B5EF4-FFF2-40B4-BE49-F238E27FC236}">
-                <a16:creationId xmlns:a16="http://schemas.microsoft.com/office/drawing/2014/main" id="{576147E8-EEEA-FD84-15A1-473A51471464}"/>
+                <a16:creationId xmlns:a16="http://schemas.microsoft.com/office/drawing/2014/main" id="{342B16D4-A9E2-4A43-382A-D4E585ECC8F7}"/>
               </a:ext>
             </a:extLst>
           </p:cNvPr>
@@ -9029,7 +9174,7 @@
     </p:spTree>
     <p:extLst>
       <p:ext uri="{BB962C8B-B14F-4D97-AF65-F5344CB8AC3E}">
-        <p14:creationId xmlns:p14="http://schemas.microsoft.com/office/powerpoint/2010/main" val="3275669698"/>
+        <p14:creationId xmlns:p14="http://schemas.microsoft.com/office/powerpoint/2010/main" val="3571578918"/>
       </p:ext>
     </p:extLst>
   </p:cSld>
@@ -9061,7 +9206,7 @@
           <p:cNvPr id="2" name="Title 1">
             <a:extLst>
               <a:ext uri="{FF2B5EF4-FFF2-40B4-BE49-F238E27FC236}">
-                <a16:creationId xmlns:a16="http://schemas.microsoft.com/office/drawing/2014/main" id="{FC5B902B-18B1-0E6F-AC82-6E7526AB46AF}"/>
+                <a16:creationId xmlns:a16="http://schemas.microsoft.com/office/drawing/2014/main" id="{76D3C611-5B79-FFE4-35B2-367640840AD0}"/>
               </a:ext>
             </a:extLst>
           </p:cNvPr>
@@ -9079,6 +9224,123 @@
           <a:p>
             <a:r>
               <a:rPr lang="en-US" dirty="0"/>
+              <a:t>DC-DC Converter</a:t>
+            </a:r>
+          </a:p>
+        </p:txBody>
+      </p:sp>
+      <p:pic>
+        <p:nvPicPr>
+          <p:cNvPr id="6" name="Content Placeholder 5" descr="A computer chip on a grey surface&#10;&#10;AI-generated content may be incorrect.">
+            <a:extLst>
+              <a:ext uri="{FF2B5EF4-FFF2-40B4-BE49-F238E27FC236}">
+                <a16:creationId xmlns:a16="http://schemas.microsoft.com/office/drawing/2014/main" id="{CF13FD14-684D-9534-ADD5-4602E42C32A9}"/>
+              </a:ext>
+            </a:extLst>
+          </p:cNvPr>
+          <p:cNvPicPr>
+            <a:picLocks noGrp="1" noChangeAspect="1"/>
+          </p:cNvPicPr>
+          <p:nvPr>
+            <p:ph sz="quarter" idx="13"/>
+          </p:nvPr>
+        </p:nvPicPr>
+        <p:blipFill>
+          <a:blip r:embed="rId2"/>
+          <a:stretch>
+            <a:fillRect/>
+          </a:stretch>
+        </p:blipFill>
+        <p:spPr>
+          <a:xfrm>
+            <a:off x="1057719" y="1399032"/>
+            <a:ext cx="10076561" cy="5199890"/>
+          </a:xfrm>
+        </p:spPr>
+      </p:pic>
+      <p:sp>
+        <p:nvSpPr>
+          <p:cNvPr id="4" name="Slide Number Placeholder 3">
+            <a:extLst>
+              <a:ext uri="{FF2B5EF4-FFF2-40B4-BE49-F238E27FC236}">
+                <a16:creationId xmlns:a16="http://schemas.microsoft.com/office/drawing/2014/main" id="{576147E8-EEEA-FD84-15A1-473A51471464}"/>
+              </a:ext>
+            </a:extLst>
+          </p:cNvPr>
+          <p:cNvSpPr>
+            <a:spLocks noGrp="1"/>
+          </p:cNvSpPr>
+          <p:nvPr>
+            <p:ph type="sldNum" sz="quarter" idx="11"/>
+          </p:nvPr>
+        </p:nvSpPr>
+        <p:spPr/>
+        <p:txBody>
+          <a:bodyPr/>
+          <a:lstStyle/>
+          <a:p>
+            <a:fld id="{B67B645E-C5E5-4727-B977-D372A0AA71D9}" type="slidenum">
+              <a:rPr lang="en-US" smtClean="0"/>
+              <a:pPr/>
+              <a:t>6</a:t>
+            </a:fld>
+            <a:endParaRPr lang="en-US" dirty="0"/>
+          </a:p>
+        </p:txBody>
+      </p:sp>
+    </p:spTree>
+    <p:extLst>
+      <p:ext uri="{BB962C8B-B14F-4D97-AF65-F5344CB8AC3E}">
+        <p14:creationId xmlns:p14="http://schemas.microsoft.com/office/powerpoint/2010/main" val="3275669698"/>
+      </p:ext>
+    </p:extLst>
+  </p:cSld>
+  <p:clrMapOvr>
+    <a:masterClrMapping/>
+  </p:clrMapOvr>
+</p:sld>
+</file>
+
+<file path=ppt/slides/slide7.xml><?xml version="1.0" encoding="utf-8"?>
+<p:sld xmlns:a="http://schemas.openxmlformats.org/drawingml/2006/main" xmlns:r="http://schemas.openxmlformats.org/officeDocument/2006/relationships" xmlns:p="http://schemas.openxmlformats.org/presentationml/2006/main">
+  <p:cSld>
+    <p:spTree>
+      <p:nvGrpSpPr>
+        <p:cNvPr id="1" name=""/>
+        <p:cNvGrpSpPr/>
+        <p:nvPr/>
+      </p:nvGrpSpPr>
+      <p:grpSpPr>
+        <a:xfrm>
+          <a:off x="0" y="0"/>
+          <a:ext cx="0" cy="0"/>
+          <a:chOff x="0" y="0"/>
+          <a:chExt cx="0" cy="0"/>
+        </a:xfrm>
+      </p:grpSpPr>
+      <p:sp>
+        <p:nvSpPr>
+          <p:cNvPr id="2" name="Title 1">
+            <a:extLst>
+              <a:ext uri="{FF2B5EF4-FFF2-40B4-BE49-F238E27FC236}">
+                <a16:creationId xmlns:a16="http://schemas.microsoft.com/office/drawing/2014/main" id="{FC5B902B-18B1-0E6F-AC82-6E7526AB46AF}"/>
+              </a:ext>
+            </a:extLst>
+          </p:cNvPr>
+          <p:cNvSpPr>
+            <a:spLocks noGrp="1"/>
+          </p:cNvSpPr>
+          <p:nvPr>
+            <p:ph type="title"/>
+          </p:nvPr>
+        </p:nvSpPr>
+        <p:spPr/>
+        <p:txBody>
+          <a:bodyPr/>
+          <a:lstStyle/>
+          <a:p>
+            <a:r>
+              <a:rPr lang="en-US" dirty="0"/>
               <a:t>Schematic Updates</a:t>
             </a:r>
           </a:p>
@@ -9108,7 +9370,7 @@
             <a:fld id="{B67B645E-C5E5-4727-B977-D372A0AA71D9}" type="slidenum">
               <a:rPr lang="en-US" smtClean="0"/>
               <a:pPr/>
-              <a:t>6</a:t>
+              <a:t>7</a:t>
             </a:fld>
             <a:endParaRPr lang="en-US" dirty="0"/>
           </a:p>
@@ -9186,7 +9448,7 @@
 </p:sld>
 </file>
 
-<file path=ppt/slides/slide7.xml><?xml version="1.0" encoding="utf-8"?>
+<file path=ppt/slides/slide8.xml><?xml version="1.0" encoding="utf-8"?>
 <p:sld xmlns:a="http://schemas.openxmlformats.org/drawingml/2006/main" xmlns:r="http://schemas.openxmlformats.org/officeDocument/2006/relationships" xmlns:p="http://schemas.openxmlformats.org/presentationml/2006/main">
   <p:cSld>
     <p:spTree>
@@ -9321,7 +9583,7 @@
             <a:fld id="{B67B645E-C5E5-4727-B977-D372A0AA71D9}" type="slidenum">
               <a:rPr lang="en-US" smtClean="0"/>
               <a:pPr/>
-              <a:t>7</a:t>
+              <a:t>8</a:t>
             </a:fld>
             <a:endParaRPr lang="en-US" dirty="0"/>
           </a:p>
@@ -9340,7 +9602,7 @@
 </p:sld>
 </file>
 
-<file path=ppt/slides/slide8.xml><?xml version="1.0" encoding="utf-8"?>
+<file path=ppt/slides/slide9.xml><?xml version="1.0" encoding="utf-8"?>
 <p:sld xmlns:a="http://schemas.openxmlformats.org/drawingml/2006/main" xmlns:r="http://schemas.openxmlformats.org/officeDocument/2006/relationships" xmlns:p="http://schemas.openxmlformats.org/presentationml/2006/main">
   <p:cSld>
     <p:spTree>
@@ -9444,7 +9706,7 @@
             <a:fld id="{B67B645E-C5E5-4727-B977-D372A0AA71D9}" type="slidenum">
               <a:rPr lang="en-US" smtClean="0"/>
               <a:pPr/>
-              <a:t>8</a:t>
+              <a:t>9</a:t>
             </a:fld>
             <a:endParaRPr lang="en-US" dirty="0"/>
           </a:p>
@@ -9454,145 +9716,6 @@
     <p:extLst>
       <p:ext uri="{BB962C8B-B14F-4D97-AF65-F5344CB8AC3E}">
         <p14:creationId xmlns:p14="http://schemas.microsoft.com/office/powerpoint/2010/main" val="1045550443"/>
-      </p:ext>
-    </p:extLst>
-  </p:cSld>
-  <p:clrMapOvr>
-    <a:masterClrMapping/>
-  </p:clrMapOvr>
-</p:sld>
-</file>
-
-<file path=ppt/slides/slide9.xml><?xml version="1.0" encoding="utf-8"?>
-<p:sld xmlns:a="http://schemas.openxmlformats.org/drawingml/2006/main" xmlns:r="http://schemas.openxmlformats.org/officeDocument/2006/relationships" xmlns:p="http://schemas.openxmlformats.org/presentationml/2006/main">
-  <p:cSld>
-    <p:spTree>
-      <p:nvGrpSpPr>
-        <p:cNvPr id="1" name=""/>
-        <p:cNvGrpSpPr/>
-        <p:nvPr/>
-      </p:nvGrpSpPr>
-      <p:grpSpPr>
-        <a:xfrm>
-          <a:off x="0" y="0"/>
-          <a:ext cx="0" cy="0"/>
-          <a:chOff x="0" y="0"/>
-          <a:chExt cx="0" cy="0"/>
-        </a:xfrm>
-      </p:grpSpPr>
-      <p:sp>
-        <p:nvSpPr>
-          <p:cNvPr id="2" name="Title 1">
-            <a:extLst>
-              <a:ext uri="{FF2B5EF4-FFF2-40B4-BE49-F238E27FC236}">
-                <a16:creationId xmlns:a16="http://schemas.microsoft.com/office/drawing/2014/main" id="{F5365765-9AD9-D0F3-3935-E61A2A115F31}"/>
-              </a:ext>
-            </a:extLst>
-          </p:cNvPr>
-          <p:cNvSpPr>
-            <a:spLocks noGrp="1"/>
-          </p:cNvSpPr>
-          <p:nvPr>
-            <p:ph type="title"/>
-          </p:nvPr>
-        </p:nvSpPr>
-        <p:spPr/>
-        <p:txBody>
-          <a:bodyPr/>
-          <a:lstStyle/>
-          <a:p>
-            <a:r>
-              <a:rPr lang="en-US" dirty="0"/>
-              <a:t>ADC Breakout Board</a:t>
-            </a:r>
-          </a:p>
-        </p:txBody>
-      </p:sp>
-      <p:sp>
-        <p:nvSpPr>
-          <p:cNvPr id="3" name="Content Placeholder 2">
-            <a:extLst>
-              <a:ext uri="{FF2B5EF4-FFF2-40B4-BE49-F238E27FC236}">
-                <a16:creationId xmlns:a16="http://schemas.microsoft.com/office/drawing/2014/main" id="{19D6FCAE-DC7C-077D-797B-3ACC9CBBDA84}"/>
-              </a:ext>
-            </a:extLst>
-          </p:cNvPr>
-          <p:cNvSpPr>
-            <a:spLocks noGrp="1"/>
-          </p:cNvSpPr>
-          <p:nvPr>
-            <p:ph sz="quarter" idx="13"/>
-          </p:nvPr>
-        </p:nvSpPr>
-        <p:spPr>
-          <a:xfrm>
-            <a:off x="841248" y="1536827"/>
-            <a:ext cx="10076688" cy="4479925"/>
-          </a:xfrm>
-        </p:spPr>
-        <p:txBody>
-          <a:bodyPr/>
-          <a:lstStyle/>
-          <a:p>
-            <a:r>
-              <a:rPr lang="en-US" dirty="0"/>
-              <a:t>Test isolated power rail</a:t>
-            </a:r>
-          </a:p>
-          <a:p>
-            <a:r>
-              <a:rPr lang="en-US" dirty="0"/>
-              <a:t>Ensure accurate readings given current</a:t>
-            </a:r>
-          </a:p>
-          <a:p>
-            <a:r>
-              <a:rPr lang="en-US" dirty="0"/>
-              <a:t>Work on software support for ADC</a:t>
-            </a:r>
-          </a:p>
-          <a:p>
-            <a:r>
-              <a:rPr lang="en-US" dirty="0"/>
-              <a:t>Feedback loop for output current</a:t>
-            </a:r>
-          </a:p>
-        </p:txBody>
-      </p:sp>
-      <p:sp>
-        <p:nvSpPr>
-          <p:cNvPr id="4" name="Slide Number Placeholder 3">
-            <a:extLst>
-              <a:ext uri="{FF2B5EF4-FFF2-40B4-BE49-F238E27FC236}">
-                <a16:creationId xmlns:a16="http://schemas.microsoft.com/office/drawing/2014/main" id="{A2A25E4D-0C19-CF84-7728-5B309132D7EA}"/>
-              </a:ext>
-            </a:extLst>
-          </p:cNvPr>
-          <p:cNvSpPr>
-            <a:spLocks noGrp="1"/>
-          </p:cNvSpPr>
-          <p:nvPr>
-            <p:ph type="sldNum" sz="quarter" idx="11"/>
-          </p:nvPr>
-        </p:nvSpPr>
-        <p:spPr/>
-        <p:txBody>
-          <a:bodyPr/>
-          <a:lstStyle/>
-          <a:p>
-            <a:fld id="{B67B645E-C5E5-4727-B977-D372A0AA71D9}" type="slidenum">
-              <a:rPr lang="en-US" smtClean="0"/>
-              <a:pPr/>
-              <a:t>9</a:t>
-            </a:fld>
-            <a:endParaRPr lang="en-US" dirty="0"/>
-          </a:p>
-        </p:txBody>
-      </p:sp>
-    </p:spTree>
-    <p:extLst>
-      <p:ext uri="{BB962C8B-B14F-4D97-AF65-F5344CB8AC3E}">
-        <p14:creationId xmlns:p14="http://schemas.microsoft.com/office/powerpoint/2010/main" val="3822539156"/>
       </p:ext>
     </p:extLst>
   </p:cSld>
@@ -10454,15 +10577,6 @@
 </file>
 
 <file path=customXml/item1.xml><?xml version="1.0" encoding="utf-8"?>
-<?mso-contentType ?>
-<FormTemplates xmlns="http://schemas.microsoft.com/sharepoint/v3/contenttype/forms">
-  <Display>DocumentLibraryForm</Display>
-  <Edit>DocumentLibraryForm</Edit>
-  <New>DocumentLibraryForm</New>
-</FormTemplates>
-</file>
-
-<file path=customXml/item2.xml><?xml version="1.0" encoding="utf-8"?>
 <ct:contentTypeSchema xmlns:ct="http://schemas.microsoft.com/office/2006/metadata/contentType" xmlns:ma="http://schemas.microsoft.com/office/2006/metadata/properties/metaAttributes" ct:_="" ma:_="" ma:contentTypeName="Document" ma:contentTypeID="0x01010079F111ED35F8CC479449609E8A0923A6" ma:contentTypeVersion="29" ma:contentTypeDescription="Create a new document." ma:contentTypeScope="" ma:versionID="6a914531ae0f23be31da2eba1f3b42a9">
   <xsd:schema xmlns:xsd="http://www.w3.org/2001/XMLSchema" xmlns:xs="http://www.w3.org/2001/XMLSchema" xmlns:p="http://schemas.microsoft.com/office/2006/metadata/properties" xmlns:ns1="http://schemas.microsoft.com/sharepoint/v3" xmlns:ns2="71af3243-3dd4-4a8d-8c0d-dd76da1f02a5" xmlns:ns3="16c05727-aa75-4e4a-9b5f-8a80a1165891" xmlns:ns4="230e9df3-be65-4c73-a93b-d1236ebd677e" targetNamespace="http://schemas.microsoft.com/office/2006/metadata/properties" ma:root="true" ma:fieldsID="ae00154c9e66547f022c4923f88826d6" ns1:_="" ns2:_="" ns3:_="" ns4:_="">
     <xsd:import namespace="http://schemas.microsoft.com/sharepoint/v3"/>
@@ -10774,6 +10888,15 @@
 </ct:contentTypeSchema>
 </file>
 
+<file path=customXml/item2.xml><?xml version="1.0" encoding="utf-8"?>
+<?mso-contentType ?>
+<FormTemplates xmlns="http://schemas.microsoft.com/sharepoint/v3/contenttype/forms">
+  <Display>DocumentLibraryForm</Display>
+  <Edit>DocumentLibraryForm</Edit>
+  <New>DocumentLibraryForm</New>
+</FormTemplates>
+</file>
+
 <file path=customXml/item3.xml><?xml version="1.0" encoding="utf-8"?>
 <p:properties xmlns:p="http://schemas.microsoft.com/office/2006/metadata/properties" xmlns:xsi="http://www.w3.org/2001/XMLSchema-instance" xmlns:pc="http://schemas.microsoft.com/office/infopath/2007/PartnerControls">
   <documentManagement>
@@ -10795,14 +10918,6 @@
 </file>
 
 <file path=customXml/itemProps1.xml><?xml version="1.0" encoding="utf-8"?>
-<ds:datastoreItem xmlns:ds="http://schemas.openxmlformats.org/officeDocument/2006/customXml" ds:itemID="{55E72E99-0076-433E-AD3A-575A11FAB73D}">
-  <ds:schemaRefs>
-    <ds:schemaRef ds:uri="http://schemas.microsoft.com/sharepoint/v3/contenttype/forms"/>
-  </ds:schemaRefs>
-</ds:datastoreItem>
-</file>
-
-<file path=customXml/itemProps2.xml><?xml version="1.0" encoding="utf-8"?>
 <ds:datastoreItem xmlns:ds="http://schemas.openxmlformats.org/officeDocument/2006/customXml" ds:itemID="{A8837B91-4329-4308-94DA-BB811B5F3092}">
   <ds:schemaRefs>
     <ds:schemaRef ds:uri="http://schemas.microsoft.com/office/2006/metadata/contentType"/>
@@ -10823,6 +10938,14 @@
 </ds:datastoreItem>
 </file>
 
+<file path=customXml/itemProps2.xml><?xml version="1.0" encoding="utf-8"?>
+<ds:datastoreItem xmlns:ds="http://schemas.openxmlformats.org/officeDocument/2006/customXml" ds:itemID="{55E72E99-0076-433E-AD3A-575A11FAB73D}">
+  <ds:schemaRefs>
+    <ds:schemaRef ds:uri="http://schemas.microsoft.com/sharepoint/v3/contenttype/forms"/>
+  </ds:schemaRefs>
+</ds:datastoreItem>
+</file>
+
 <file path=customXml/itemProps3.xml><?xml version="1.0" encoding="utf-8"?>
 <ds:datastoreItem xmlns:ds="http://schemas.openxmlformats.org/officeDocument/2006/customXml" ds:itemID="{7B247F30-5811-40C0-99EC-CF53200590BE}">
   <ds:schemaRefs>

--- a/Presentations/Week_9_Presentation.pptx
+++ b/Presentations/Week_9_Presentation.pptx
@@ -5,10 +5,10 @@
     <p:sldMasterId id="2147483648" r:id="rId4"/>
   </p:sldMasterIdLst>
   <p:notesMasterIdLst>
-    <p:notesMasterId r:id="rId22"/>
+    <p:notesMasterId r:id="rId23"/>
   </p:notesMasterIdLst>
   <p:handoutMasterIdLst>
-    <p:handoutMasterId r:id="rId23"/>
+    <p:handoutMasterId r:id="rId24"/>
   </p:handoutMasterIdLst>
   <p:sldIdLst>
     <p:sldId id="305" r:id="rId5"/>
@@ -25,9 +25,10 @@
     <p:sldId id="358" r:id="rId16"/>
     <p:sldId id="362" r:id="rId17"/>
     <p:sldId id="365" r:id="rId18"/>
-    <p:sldId id="331" r:id="rId19"/>
-    <p:sldId id="330" r:id="rId20"/>
-    <p:sldId id="318" r:id="rId21"/>
+    <p:sldId id="368" r:id="rId19"/>
+    <p:sldId id="331" r:id="rId20"/>
+    <p:sldId id="330" r:id="rId21"/>
+    <p:sldId id="318" r:id="rId22"/>
   </p:sldIdLst>
   <p:sldSz cx="12192000" cy="6858000"/>
   <p:notesSz cx="6858000" cy="9144000"/>
@@ -8358,7 +8359,7 @@
           <p:cNvPr id="2" name="Title 1">
             <a:extLst>
               <a:ext uri="{FF2B5EF4-FFF2-40B4-BE49-F238E27FC236}">
-                <a16:creationId xmlns:a16="http://schemas.microsoft.com/office/drawing/2014/main" id="{A77F160B-AF27-B7B9-795A-6950EC477D75}"/>
+                <a16:creationId xmlns:a16="http://schemas.microsoft.com/office/drawing/2014/main" id="{2B48C769-9D59-F201-C33F-7A9E3BF26CCA}"/>
               </a:ext>
             </a:extLst>
           </p:cNvPr>
@@ -8376,59 +8377,49 @@
           <a:p>
             <a:r>
               <a:rPr lang="en-US" dirty="0"/>
-              <a:t>Challenges so far</a:t>
-            </a:r>
-          </a:p>
-        </p:txBody>
-      </p:sp>
-      <p:sp>
-        <p:nvSpPr>
-          <p:cNvPr id="3" name="Content Placeholder 2">
-            <a:extLst>
-              <a:ext uri="{FF2B5EF4-FFF2-40B4-BE49-F238E27FC236}">
-                <a16:creationId xmlns:a16="http://schemas.microsoft.com/office/drawing/2014/main" id="{D51F76C4-2D7C-3DF9-F61F-30FCC2A901ED}"/>
-              </a:ext>
-            </a:extLst>
-          </p:cNvPr>
-          <p:cNvSpPr>
-            <a:spLocks noGrp="1"/>
-          </p:cNvSpPr>
+              <a:t>Updated BOM</a:t>
+            </a:r>
+          </a:p>
+        </p:txBody>
+      </p:sp>
+      <p:pic>
+        <p:nvPicPr>
+          <p:cNvPr id="6" name="Content Placeholder 5">
+            <a:extLst>
+              <a:ext uri="{FF2B5EF4-FFF2-40B4-BE49-F238E27FC236}">
+                <a16:creationId xmlns:a16="http://schemas.microsoft.com/office/drawing/2014/main" id="{8F2340C0-0ECF-4FC4-DDB5-496D8F3A6DA0}"/>
+              </a:ext>
+            </a:extLst>
+          </p:cNvPr>
+          <p:cNvPicPr>
+            <a:picLocks noGrp="1" noChangeAspect="1"/>
+          </p:cNvPicPr>
           <p:nvPr>
             <p:ph sz="quarter" idx="13"/>
           </p:nvPr>
-        </p:nvSpPr>
-        <p:spPr>
-          <a:xfrm>
-            <a:off x="841248" y="1536827"/>
-            <a:ext cx="10076688" cy="4479925"/>
-          </a:xfrm>
-        </p:spPr>
-        <p:txBody>
-          <a:bodyPr/>
-          <a:lstStyle/>
-          <a:p>
-            <a:r>
-              <a:rPr lang="en-US" dirty="0"/>
-              <a:t>Space is extremely limited</a:t>
-            </a:r>
-          </a:p>
-          <a:p>
-            <a:r>
-              <a:rPr lang="en-US" dirty="0"/>
-              <a:t>Some components are hard to find</a:t>
-            </a:r>
-          </a:p>
-          <a:p>
-            <a:endParaRPr lang="en-US" dirty="0"/>
-          </a:p>
-        </p:txBody>
-      </p:sp>
+        </p:nvPicPr>
+        <p:blipFill>
+          <a:blip r:embed="rId2"/>
+          <a:stretch>
+            <a:fillRect/>
+          </a:stretch>
+        </p:blipFill>
+        <p:spPr>
+          <a:xfrm>
+            <a:off x="998853" y="1805566"/>
+            <a:ext cx="10194294" cy="4211186"/>
+          </a:xfrm>
+          <a:prstGeom prst="rect">
+            <a:avLst/>
+          </a:prstGeom>
+        </p:spPr>
+      </p:pic>
       <p:sp>
         <p:nvSpPr>
           <p:cNvPr id="4" name="Slide Number Placeholder 3">
             <a:extLst>
               <a:ext uri="{FF2B5EF4-FFF2-40B4-BE49-F238E27FC236}">
-                <a16:creationId xmlns:a16="http://schemas.microsoft.com/office/drawing/2014/main" id="{8DC54A4F-408F-2AE8-E17D-8D70EF316CD6}"/>
+                <a16:creationId xmlns:a16="http://schemas.microsoft.com/office/drawing/2014/main" id="{C80C4333-0EC0-91D6-15EF-53B3BFFE2CD6}"/>
               </a:ext>
             </a:extLst>
           </p:cNvPr>
@@ -8456,7 +8447,7 @@
     </p:spTree>
     <p:extLst>
       <p:ext uri="{BB962C8B-B14F-4D97-AF65-F5344CB8AC3E}">
-        <p14:creationId xmlns:p14="http://schemas.microsoft.com/office/powerpoint/2010/main" val="1809417748"/>
+        <p14:creationId xmlns:p14="http://schemas.microsoft.com/office/powerpoint/2010/main" val="2589508653"/>
       </p:ext>
     </p:extLst>
   </p:cSld>
@@ -8488,7 +8479,7 @@
           <p:cNvPr id="2" name="Title 1">
             <a:extLst>
               <a:ext uri="{FF2B5EF4-FFF2-40B4-BE49-F238E27FC236}">
-                <a16:creationId xmlns:a16="http://schemas.microsoft.com/office/drawing/2014/main" id="{E178EF87-E3BB-A226-DCCF-2D45CE9BE47B}"/>
+                <a16:creationId xmlns:a16="http://schemas.microsoft.com/office/drawing/2014/main" id="{A77F160B-AF27-B7B9-795A-6950EC477D75}"/>
               </a:ext>
             </a:extLst>
           </p:cNvPr>
@@ -8506,7 +8497,7 @@
           <a:p>
             <a:r>
               <a:rPr lang="en-US" dirty="0"/>
-              <a:t>Immediate Plan</a:t>
+              <a:t>Challenges so far</a:t>
             </a:r>
           </a:p>
         </p:txBody>
@@ -8516,7 +8507,7 @@
           <p:cNvPr id="3" name="Content Placeholder 2">
             <a:extLst>
               <a:ext uri="{FF2B5EF4-FFF2-40B4-BE49-F238E27FC236}">
-                <a16:creationId xmlns:a16="http://schemas.microsoft.com/office/drawing/2014/main" id="{1F4E9115-94A4-A2F8-8B11-947907F62B45}"/>
+                <a16:creationId xmlns:a16="http://schemas.microsoft.com/office/drawing/2014/main" id="{D51F76C4-2D7C-3DF9-F61F-30FCC2A901ED}"/>
               </a:ext>
             </a:extLst>
           </p:cNvPr>
@@ -8530,7 +8521,7 @@
         <p:spPr>
           <a:xfrm>
             <a:off x="841248" y="1536827"/>
-            <a:ext cx="10479024" cy="4479925"/>
+            <a:ext cx="10076688" cy="4479925"/>
           </a:xfrm>
         </p:spPr>
         <p:txBody>
@@ -8539,25 +8530,13 @@
           <a:p>
             <a:r>
               <a:rPr lang="en-US" dirty="0"/>
-              <a:t>Layout completed rooms</a:t>
+              <a:t>Space is extremely limited</a:t>
             </a:r>
           </a:p>
           <a:p>
             <a:r>
               <a:rPr lang="en-US" dirty="0"/>
-              <a:t>Get flyback stuff working</a:t>
-            </a:r>
-          </a:p>
-          <a:p>
-            <a:r>
-              <a:rPr lang="en-US" dirty="0"/>
-              <a:t>Battery</a:t>
-            </a:r>
-          </a:p>
-          <a:p>
-            <a:r>
-              <a:rPr lang="en-US" dirty="0"/>
-              <a:t>ADC software</a:t>
+              <a:t>Some components are hard to find</a:t>
             </a:r>
           </a:p>
           <a:p>
@@ -8570,7 +8549,7 @@
           <p:cNvPr id="4" name="Slide Number Placeholder 3">
             <a:extLst>
               <a:ext uri="{FF2B5EF4-FFF2-40B4-BE49-F238E27FC236}">
-                <a16:creationId xmlns:a16="http://schemas.microsoft.com/office/drawing/2014/main" id="{305C2303-290B-35FB-A4CD-104764401AD5}"/>
+                <a16:creationId xmlns:a16="http://schemas.microsoft.com/office/drawing/2014/main" id="{8DC54A4F-408F-2AE8-E17D-8D70EF316CD6}"/>
               </a:ext>
             </a:extLst>
           </p:cNvPr>
@@ -8590,6 +8569,148 @@
               <a:rPr lang="en-US" smtClean="0"/>
               <a:pPr/>
               <a:t>16</a:t>
+            </a:fld>
+            <a:endParaRPr lang="en-US" dirty="0"/>
+          </a:p>
+        </p:txBody>
+      </p:sp>
+    </p:spTree>
+    <p:extLst>
+      <p:ext uri="{BB962C8B-B14F-4D97-AF65-F5344CB8AC3E}">
+        <p14:creationId xmlns:p14="http://schemas.microsoft.com/office/powerpoint/2010/main" val="1809417748"/>
+      </p:ext>
+    </p:extLst>
+  </p:cSld>
+  <p:clrMapOvr>
+    <a:masterClrMapping/>
+  </p:clrMapOvr>
+</p:sld>
+</file>
+
+<file path=ppt/slides/slide17.xml><?xml version="1.0" encoding="utf-8"?>
+<p:sld xmlns:a="http://schemas.openxmlformats.org/drawingml/2006/main" xmlns:r="http://schemas.openxmlformats.org/officeDocument/2006/relationships" xmlns:p="http://schemas.openxmlformats.org/presentationml/2006/main">
+  <p:cSld>
+    <p:spTree>
+      <p:nvGrpSpPr>
+        <p:cNvPr id="1" name=""/>
+        <p:cNvGrpSpPr/>
+        <p:nvPr/>
+      </p:nvGrpSpPr>
+      <p:grpSpPr>
+        <a:xfrm>
+          <a:off x="0" y="0"/>
+          <a:ext cx="0" cy="0"/>
+          <a:chOff x="0" y="0"/>
+          <a:chExt cx="0" cy="0"/>
+        </a:xfrm>
+      </p:grpSpPr>
+      <p:sp>
+        <p:nvSpPr>
+          <p:cNvPr id="2" name="Title 1">
+            <a:extLst>
+              <a:ext uri="{FF2B5EF4-FFF2-40B4-BE49-F238E27FC236}">
+                <a16:creationId xmlns:a16="http://schemas.microsoft.com/office/drawing/2014/main" id="{E178EF87-E3BB-A226-DCCF-2D45CE9BE47B}"/>
+              </a:ext>
+            </a:extLst>
+          </p:cNvPr>
+          <p:cNvSpPr>
+            <a:spLocks noGrp="1"/>
+          </p:cNvSpPr>
+          <p:nvPr>
+            <p:ph type="title"/>
+          </p:nvPr>
+        </p:nvSpPr>
+        <p:spPr/>
+        <p:txBody>
+          <a:bodyPr/>
+          <a:lstStyle/>
+          <a:p>
+            <a:r>
+              <a:rPr lang="en-US" dirty="0"/>
+              <a:t>Immediate Plan</a:t>
+            </a:r>
+          </a:p>
+        </p:txBody>
+      </p:sp>
+      <p:sp>
+        <p:nvSpPr>
+          <p:cNvPr id="3" name="Content Placeholder 2">
+            <a:extLst>
+              <a:ext uri="{FF2B5EF4-FFF2-40B4-BE49-F238E27FC236}">
+                <a16:creationId xmlns:a16="http://schemas.microsoft.com/office/drawing/2014/main" id="{1F4E9115-94A4-A2F8-8B11-947907F62B45}"/>
+              </a:ext>
+            </a:extLst>
+          </p:cNvPr>
+          <p:cNvSpPr>
+            <a:spLocks noGrp="1"/>
+          </p:cNvSpPr>
+          <p:nvPr>
+            <p:ph sz="quarter" idx="13"/>
+          </p:nvPr>
+        </p:nvSpPr>
+        <p:spPr>
+          <a:xfrm>
+            <a:off x="841248" y="1536827"/>
+            <a:ext cx="10479024" cy="4479925"/>
+          </a:xfrm>
+        </p:spPr>
+        <p:txBody>
+          <a:bodyPr/>
+          <a:lstStyle/>
+          <a:p>
+            <a:r>
+              <a:rPr lang="en-US" dirty="0"/>
+              <a:t>Layout completed rooms</a:t>
+            </a:r>
+          </a:p>
+          <a:p>
+            <a:r>
+              <a:rPr lang="en-US" dirty="0"/>
+              <a:t>Get flyback stuff working</a:t>
+            </a:r>
+          </a:p>
+          <a:p>
+            <a:r>
+              <a:rPr lang="en-US" dirty="0"/>
+              <a:t>Battery</a:t>
+            </a:r>
+          </a:p>
+          <a:p>
+            <a:r>
+              <a:rPr lang="en-US" dirty="0"/>
+              <a:t>ADC software</a:t>
+            </a:r>
+          </a:p>
+          <a:p>
+            <a:endParaRPr lang="en-US" dirty="0"/>
+          </a:p>
+        </p:txBody>
+      </p:sp>
+      <p:sp>
+        <p:nvSpPr>
+          <p:cNvPr id="4" name="Slide Number Placeholder 3">
+            <a:extLst>
+              <a:ext uri="{FF2B5EF4-FFF2-40B4-BE49-F238E27FC236}">
+                <a16:creationId xmlns:a16="http://schemas.microsoft.com/office/drawing/2014/main" id="{305C2303-290B-35FB-A4CD-104764401AD5}"/>
+              </a:ext>
+            </a:extLst>
+          </p:cNvPr>
+          <p:cNvSpPr>
+            <a:spLocks noGrp="1"/>
+          </p:cNvSpPr>
+          <p:nvPr>
+            <p:ph type="sldNum" sz="quarter" idx="11"/>
+          </p:nvPr>
+        </p:nvSpPr>
+        <p:spPr/>
+        <p:txBody>
+          <a:bodyPr/>
+          <a:lstStyle/>
+          <a:p>
+            <a:fld id="{B67B645E-C5E5-4727-B977-D372A0AA71D9}" type="slidenum">
+              <a:rPr lang="en-US" smtClean="0"/>
+              <a:pPr/>
+              <a:t>17</a:t>
             </a:fld>
             <a:endParaRPr lang="en-US" dirty="0"/>
           </a:p>
@@ -8608,7 +8729,7 @@
 </p:sld>
 </file>
 
-<file path=ppt/slides/slide17.xml><?xml version="1.0" encoding="utf-8"?>
+<file path=ppt/slides/slide18.xml><?xml version="1.0" encoding="utf-8"?>
 <p:sld xmlns:a="http://schemas.openxmlformats.org/drawingml/2006/main" xmlns:r="http://schemas.openxmlformats.org/officeDocument/2006/relationships" xmlns:p="http://schemas.openxmlformats.org/presentationml/2006/main">
   <p:cSld>
     <p:spTree>
@@ -10577,6 +10698,15 @@
 </file>
 
 <file path=customXml/item1.xml><?xml version="1.0" encoding="utf-8"?>
+<?mso-contentType ?>
+<FormTemplates xmlns="http://schemas.microsoft.com/sharepoint/v3/contenttype/forms">
+  <Display>DocumentLibraryForm</Display>
+  <Edit>DocumentLibraryForm</Edit>
+  <New>DocumentLibraryForm</New>
+</FormTemplates>
+</file>
+
+<file path=customXml/item2.xml><?xml version="1.0" encoding="utf-8"?>
 <ct:contentTypeSchema xmlns:ct="http://schemas.microsoft.com/office/2006/metadata/contentType" xmlns:ma="http://schemas.microsoft.com/office/2006/metadata/properties/metaAttributes" ct:_="" ma:_="" ma:contentTypeName="Document" ma:contentTypeID="0x01010079F111ED35F8CC479449609E8A0923A6" ma:contentTypeVersion="29" ma:contentTypeDescription="Create a new document." ma:contentTypeScope="" ma:versionID="6a914531ae0f23be31da2eba1f3b42a9">
   <xsd:schema xmlns:xsd="http://www.w3.org/2001/XMLSchema" xmlns:xs="http://www.w3.org/2001/XMLSchema" xmlns:p="http://schemas.microsoft.com/office/2006/metadata/properties" xmlns:ns1="http://schemas.microsoft.com/sharepoint/v3" xmlns:ns2="71af3243-3dd4-4a8d-8c0d-dd76da1f02a5" xmlns:ns3="16c05727-aa75-4e4a-9b5f-8a80a1165891" xmlns:ns4="230e9df3-be65-4c73-a93b-d1236ebd677e" targetNamespace="http://schemas.microsoft.com/office/2006/metadata/properties" ma:root="true" ma:fieldsID="ae00154c9e66547f022c4923f88826d6" ns1:_="" ns2:_="" ns3:_="" ns4:_="">
     <xsd:import namespace="http://schemas.microsoft.com/sharepoint/v3"/>
@@ -10888,15 +11018,6 @@
 </ct:contentTypeSchema>
 </file>
 
-<file path=customXml/item2.xml><?xml version="1.0" encoding="utf-8"?>
-<?mso-contentType ?>
-<FormTemplates xmlns="http://schemas.microsoft.com/sharepoint/v3/contenttype/forms">
-  <Display>DocumentLibraryForm</Display>
-  <Edit>DocumentLibraryForm</Edit>
-  <New>DocumentLibraryForm</New>
-</FormTemplates>
-</file>
-
 <file path=customXml/item3.xml><?xml version="1.0" encoding="utf-8"?>
 <p:properties xmlns:p="http://schemas.microsoft.com/office/2006/metadata/properties" xmlns:xsi="http://www.w3.org/2001/XMLSchema-instance" xmlns:pc="http://schemas.microsoft.com/office/infopath/2007/PartnerControls">
   <documentManagement>
@@ -10918,6 +11039,14 @@
 </file>
 
 <file path=customXml/itemProps1.xml><?xml version="1.0" encoding="utf-8"?>
+<ds:datastoreItem xmlns:ds="http://schemas.openxmlformats.org/officeDocument/2006/customXml" ds:itemID="{55E72E99-0076-433E-AD3A-575A11FAB73D}">
+  <ds:schemaRefs>
+    <ds:schemaRef ds:uri="http://schemas.microsoft.com/sharepoint/v3/contenttype/forms"/>
+  </ds:schemaRefs>
+</ds:datastoreItem>
+</file>
+
+<file path=customXml/itemProps2.xml><?xml version="1.0" encoding="utf-8"?>
 <ds:datastoreItem xmlns:ds="http://schemas.openxmlformats.org/officeDocument/2006/customXml" ds:itemID="{A8837B91-4329-4308-94DA-BB811B5F3092}">
   <ds:schemaRefs>
     <ds:schemaRef ds:uri="http://schemas.microsoft.com/office/2006/metadata/contentType"/>
@@ -10938,14 +11067,6 @@
 </ds:datastoreItem>
 </file>
 
-<file path=customXml/itemProps2.xml><?xml version="1.0" encoding="utf-8"?>
-<ds:datastoreItem xmlns:ds="http://schemas.openxmlformats.org/officeDocument/2006/customXml" ds:itemID="{55E72E99-0076-433E-AD3A-575A11FAB73D}">
-  <ds:schemaRefs>
-    <ds:schemaRef ds:uri="http://schemas.microsoft.com/sharepoint/v3/contenttype/forms"/>
-  </ds:schemaRefs>
-</ds:datastoreItem>
-</file>
-
 <file path=customXml/itemProps3.xml><?xml version="1.0" encoding="utf-8"?>
 <ds:datastoreItem xmlns:ds="http://schemas.openxmlformats.org/officeDocument/2006/customXml" ds:itemID="{7B247F30-5811-40C0-99EC-CF53200590BE}">
   <ds:schemaRefs>
